--- a/img/logos/logos_project.pptx
+++ b/img/logos/logos_project.pptx
@@ -5,13 +5,12 @@
     <p:sldMasterId id="2147483660" r:id="rId1"/>
   </p:sldMasterIdLst>
   <p:sldIdLst>
-    <p:sldId id="256" r:id="rId2"/>
-    <p:sldId id="257" r:id="rId3"/>
-    <p:sldId id="258" r:id="rId4"/>
-    <p:sldId id="265" r:id="rId5"/>
-    <p:sldId id="263" r:id="rId6"/>
-    <p:sldId id="264" r:id="rId7"/>
-    <p:sldId id="261" r:id="rId8"/>
+    <p:sldId id="257" r:id="rId2"/>
+    <p:sldId id="258" r:id="rId3"/>
+    <p:sldId id="265" r:id="rId4"/>
+    <p:sldId id="263" r:id="rId5"/>
+    <p:sldId id="264" r:id="rId6"/>
+    <p:sldId id="261" r:id="rId7"/>
   </p:sldIdLst>
   <p:sldSz cx="43891200" cy="32918400"/>
   <p:notesSz cx="6858000" cy="9144000"/>
@@ -260,7 +259,7 @@
           <a:p>
             <a:fld id="{D43B2DCA-611E-204D-8C63-684D4F30793A}" type="datetimeFigureOut">
               <a:rPr lang="en-US" smtClean="0"/>
-              <a:t>8/19/24</a:t>
+              <a:t>10/21/24</a:t>
             </a:fld>
             <a:endParaRPr lang="en-US"/>
           </a:p>
@@ -430,7 +429,7 @@
           <a:p>
             <a:fld id="{D43B2DCA-611E-204D-8C63-684D4F30793A}" type="datetimeFigureOut">
               <a:rPr lang="en-US" smtClean="0"/>
-              <a:t>8/19/24</a:t>
+              <a:t>10/21/24</a:t>
             </a:fld>
             <a:endParaRPr lang="en-US"/>
           </a:p>
@@ -610,7 +609,7 @@
           <a:p>
             <a:fld id="{D43B2DCA-611E-204D-8C63-684D4F30793A}" type="datetimeFigureOut">
               <a:rPr lang="en-US" smtClean="0"/>
-              <a:t>8/19/24</a:t>
+              <a:t>10/21/24</a:t>
             </a:fld>
             <a:endParaRPr lang="en-US"/>
           </a:p>
@@ -780,7 +779,7 @@
           <a:p>
             <a:fld id="{D43B2DCA-611E-204D-8C63-684D4F30793A}" type="datetimeFigureOut">
               <a:rPr lang="en-US" smtClean="0"/>
-              <a:t>8/19/24</a:t>
+              <a:t>10/21/24</a:t>
             </a:fld>
             <a:endParaRPr lang="en-US"/>
           </a:p>
@@ -1026,7 +1025,7 @@
           <a:p>
             <a:fld id="{D43B2DCA-611E-204D-8C63-684D4F30793A}" type="datetimeFigureOut">
               <a:rPr lang="en-US" smtClean="0"/>
-              <a:t>8/19/24</a:t>
+              <a:t>10/21/24</a:t>
             </a:fld>
             <a:endParaRPr lang="en-US"/>
           </a:p>
@@ -1258,7 +1257,7 @@
           <a:p>
             <a:fld id="{D43B2DCA-611E-204D-8C63-684D4F30793A}" type="datetimeFigureOut">
               <a:rPr lang="en-US" smtClean="0"/>
-              <a:t>8/19/24</a:t>
+              <a:t>10/21/24</a:t>
             </a:fld>
             <a:endParaRPr lang="en-US"/>
           </a:p>
@@ -1625,7 +1624,7 @@
           <a:p>
             <a:fld id="{D43B2DCA-611E-204D-8C63-684D4F30793A}" type="datetimeFigureOut">
               <a:rPr lang="en-US" smtClean="0"/>
-              <a:t>8/19/24</a:t>
+              <a:t>10/21/24</a:t>
             </a:fld>
             <a:endParaRPr lang="en-US"/>
           </a:p>
@@ -1743,7 +1742,7 @@
           <a:p>
             <a:fld id="{D43B2DCA-611E-204D-8C63-684D4F30793A}" type="datetimeFigureOut">
               <a:rPr lang="en-US" smtClean="0"/>
-              <a:t>8/19/24</a:t>
+              <a:t>10/21/24</a:t>
             </a:fld>
             <a:endParaRPr lang="en-US"/>
           </a:p>
@@ -1838,7 +1837,7 @@
           <a:p>
             <a:fld id="{D43B2DCA-611E-204D-8C63-684D4F30793A}" type="datetimeFigureOut">
               <a:rPr lang="en-US" smtClean="0"/>
-              <a:t>8/19/24</a:t>
+              <a:t>10/21/24</a:t>
             </a:fld>
             <a:endParaRPr lang="en-US"/>
           </a:p>
@@ -2115,7 +2114,7 @@
           <a:p>
             <a:fld id="{D43B2DCA-611E-204D-8C63-684D4F30793A}" type="datetimeFigureOut">
               <a:rPr lang="en-US" smtClean="0"/>
-              <a:t>8/19/24</a:t>
+              <a:t>10/21/24</a:t>
             </a:fld>
             <a:endParaRPr lang="en-US"/>
           </a:p>
@@ -2372,7 +2371,7 @@
           <a:p>
             <a:fld id="{D43B2DCA-611E-204D-8C63-684D4F30793A}" type="datetimeFigureOut">
               <a:rPr lang="en-US" smtClean="0"/>
-              <a:t>8/19/24</a:t>
+              <a:t>10/21/24</a:t>
             </a:fld>
             <a:endParaRPr lang="en-US"/>
           </a:p>
@@ -2585,7 +2584,7 @@
           <a:p>
             <a:fld id="{D43B2DCA-611E-204D-8C63-684D4F30793A}" type="datetimeFigureOut">
               <a:rPr lang="en-US" smtClean="0"/>
-              <a:t>8/19/24</a:t>
+              <a:t>10/21/24</a:t>
             </a:fld>
             <a:endParaRPr lang="en-US"/>
           </a:p>
@@ -2974,397 +2973,6 @@
 </file>
 
 <file path=ppt/slides/slide1.xml><?xml version="1.0" encoding="utf-8"?>
-<p:sld xmlns:a="http://schemas.openxmlformats.org/drawingml/2006/main" xmlns:r="http://schemas.openxmlformats.org/officeDocument/2006/relationships" xmlns:p="http://schemas.openxmlformats.org/presentationml/2006/main">
-  <p:cSld>
-    <p:spTree>
-      <p:nvGrpSpPr>
-        <p:cNvPr id="1" name=""/>
-        <p:cNvGrpSpPr/>
-        <p:nvPr/>
-      </p:nvGrpSpPr>
-      <p:grpSpPr>
-        <a:xfrm>
-          <a:off x="0" y="0"/>
-          <a:ext cx="0" cy="0"/>
-          <a:chOff x="0" y="0"/>
-          <a:chExt cx="0" cy="0"/>
-        </a:xfrm>
-      </p:grpSpPr>
-      <p:sp>
-        <p:nvSpPr>
-          <p:cNvPr id="4" name="Hexagon 3">
-            <a:extLst>
-              <a:ext uri="{FF2B5EF4-FFF2-40B4-BE49-F238E27FC236}">
-                <a16:creationId xmlns:a16="http://schemas.microsoft.com/office/drawing/2014/main" id="{85AF1A33-54B6-D500-9109-8DF8AB01CCEF}"/>
-              </a:ext>
-            </a:extLst>
-          </p:cNvPr>
-          <p:cNvSpPr/>
-          <p:nvPr/>
-        </p:nvSpPr>
-        <p:spPr>
-          <a:xfrm>
-            <a:off x="8204386" y="5045285"/>
-            <a:ext cx="27482427" cy="23687286"/>
-          </a:xfrm>
-          <a:prstGeom prst="hexagon">
-            <a:avLst>
-              <a:gd name="adj" fmla="val 29102"/>
-              <a:gd name="vf" fmla="val 115470"/>
-            </a:avLst>
-          </a:prstGeom>
-        </p:spPr>
-        <p:style>
-          <a:lnRef idx="2">
-            <a:schemeClr val="accent1">
-              <a:shade val="15000"/>
-            </a:schemeClr>
-          </a:lnRef>
-          <a:fillRef idx="1">
-            <a:schemeClr val="accent1"/>
-          </a:fillRef>
-          <a:effectRef idx="0">
-            <a:schemeClr val="accent1"/>
-          </a:effectRef>
-          <a:fontRef idx="minor">
-            <a:schemeClr val="lt1"/>
-          </a:fontRef>
-        </p:style>
-        <p:txBody>
-          <a:bodyPr rtlCol="0" anchor="ctr"/>
-          <a:lstStyle/>
-          <a:p>
-            <a:pPr algn="ctr"/>
-            <a:endParaRPr lang="en-US" dirty="0"/>
-          </a:p>
-        </p:txBody>
-      </p:sp>
-      <p:grpSp>
-        <p:nvGrpSpPr>
-          <p:cNvPr id="11" name="Group 10">
-            <a:extLst>
-              <a:ext uri="{FF2B5EF4-FFF2-40B4-BE49-F238E27FC236}">
-                <a16:creationId xmlns:a16="http://schemas.microsoft.com/office/drawing/2014/main" id="{16E2E843-018D-F7CC-A188-F76354A8E855}"/>
-              </a:ext>
-            </a:extLst>
-          </p:cNvPr>
-          <p:cNvGrpSpPr/>
-          <p:nvPr/>
-        </p:nvGrpSpPr>
-        <p:grpSpPr>
-          <a:xfrm>
-            <a:off x="8951976" y="5241261"/>
-            <a:ext cx="25947624" cy="10807262"/>
-            <a:chOff x="8951976" y="5241261"/>
-            <a:chExt cx="25947624" cy="10807262"/>
-          </a:xfrm>
-        </p:grpSpPr>
-        <p:sp>
-          <p:nvSpPr>
-            <p:cNvPr id="5" name="Triangle 4">
-              <a:extLst>
-                <a:ext uri="{FF2B5EF4-FFF2-40B4-BE49-F238E27FC236}">
-                  <a16:creationId xmlns:a16="http://schemas.microsoft.com/office/drawing/2014/main" id="{BC0FD1B4-493D-C5F2-C3A7-5EC339ABB6FD}"/>
-                </a:ext>
-              </a:extLst>
-            </p:cNvPr>
-            <p:cNvSpPr/>
-            <p:nvPr/>
-          </p:nvSpPr>
-          <p:spPr>
-            <a:xfrm>
-              <a:off x="8951976" y="5241261"/>
-              <a:ext cx="12536424" cy="10807262"/>
-            </a:xfrm>
-            <a:prstGeom prst="triangle">
-              <a:avLst/>
-            </a:prstGeom>
-            <a:solidFill>
-              <a:schemeClr val="bg1"/>
-            </a:solidFill>
-          </p:spPr>
-          <p:style>
-            <a:lnRef idx="2">
-              <a:schemeClr val="accent1">
-                <a:shade val="15000"/>
-              </a:schemeClr>
-            </a:lnRef>
-            <a:fillRef idx="1">
-              <a:schemeClr val="accent1"/>
-            </a:fillRef>
-            <a:effectRef idx="0">
-              <a:schemeClr val="accent1"/>
-            </a:effectRef>
-            <a:fontRef idx="minor">
-              <a:schemeClr val="lt1"/>
-            </a:fontRef>
-          </p:style>
-          <p:txBody>
-            <a:bodyPr rtlCol="0" anchor="ctr"/>
-            <a:lstStyle/>
-            <a:p>
-              <a:pPr algn="ctr"/>
-              <a:endParaRPr lang="en-US" dirty="0"/>
-            </a:p>
-          </p:txBody>
-        </p:sp>
-        <p:sp>
-          <p:nvSpPr>
-            <p:cNvPr id="7" name="Triangle 6">
-              <a:extLst>
-                <a:ext uri="{FF2B5EF4-FFF2-40B4-BE49-F238E27FC236}">
-                  <a16:creationId xmlns:a16="http://schemas.microsoft.com/office/drawing/2014/main" id="{BC78C2F5-861A-71E1-994F-37C8113CC8CF}"/>
-                </a:ext>
-              </a:extLst>
-            </p:cNvPr>
-            <p:cNvSpPr/>
-            <p:nvPr/>
-          </p:nvSpPr>
-          <p:spPr>
-            <a:xfrm>
-              <a:off x="22363176" y="5241261"/>
-              <a:ext cx="12536424" cy="10807262"/>
-            </a:xfrm>
-            <a:prstGeom prst="triangle">
-              <a:avLst/>
-            </a:prstGeom>
-            <a:solidFill>
-              <a:schemeClr val="bg1"/>
-            </a:solidFill>
-          </p:spPr>
-          <p:style>
-            <a:lnRef idx="2">
-              <a:schemeClr val="accent1">
-                <a:shade val="15000"/>
-              </a:schemeClr>
-            </a:lnRef>
-            <a:fillRef idx="1">
-              <a:schemeClr val="accent1"/>
-            </a:fillRef>
-            <a:effectRef idx="0">
-              <a:schemeClr val="accent1"/>
-            </a:effectRef>
-            <a:fontRef idx="minor">
-              <a:schemeClr val="lt1"/>
-            </a:fontRef>
-          </p:style>
-          <p:txBody>
-            <a:bodyPr rtlCol="0" anchor="ctr"/>
-            <a:lstStyle/>
-            <a:p>
-              <a:pPr algn="ctr"/>
-              <a:endParaRPr lang="en-US" dirty="0"/>
-            </a:p>
-          </p:txBody>
-        </p:sp>
-      </p:grpSp>
-      <p:sp>
-        <p:nvSpPr>
-          <p:cNvPr id="10" name="Triangle 9">
-            <a:extLst>
-              <a:ext uri="{FF2B5EF4-FFF2-40B4-BE49-F238E27FC236}">
-                <a16:creationId xmlns:a16="http://schemas.microsoft.com/office/drawing/2014/main" id="{A68795D2-B9BA-0E22-6CDE-5ADEF06EB3A2}"/>
-              </a:ext>
-            </a:extLst>
-          </p:cNvPr>
-          <p:cNvSpPr/>
-          <p:nvPr/>
-        </p:nvSpPr>
-        <p:spPr>
-          <a:xfrm>
-            <a:off x="15657576" y="16888928"/>
-            <a:ext cx="12536424" cy="10807262"/>
-          </a:xfrm>
-          <a:prstGeom prst="triangle">
-            <a:avLst/>
-          </a:prstGeom>
-          <a:solidFill>
-            <a:schemeClr val="bg1"/>
-          </a:solidFill>
-        </p:spPr>
-        <p:style>
-          <a:lnRef idx="2">
-            <a:schemeClr val="accent1">
-              <a:shade val="15000"/>
-            </a:schemeClr>
-          </a:lnRef>
-          <a:fillRef idx="1">
-            <a:schemeClr val="accent1"/>
-          </a:fillRef>
-          <a:effectRef idx="0">
-            <a:schemeClr val="accent1"/>
-          </a:effectRef>
-          <a:fontRef idx="minor">
-            <a:schemeClr val="lt1"/>
-          </a:fontRef>
-        </p:style>
-        <p:txBody>
-          <a:bodyPr rtlCol="0" anchor="ctr"/>
-          <a:lstStyle/>
-          <a:p>
-            <a:pPr algn="ctr"/>
-            <a:endParaRPr lang="en-US" dirty="0"/>
-          </a:p>
-        </p:txBody>
-      </p:sp>
-      <p:sp>
-        <p:nvSpPr>
-          <p:cNvPr id="13" name="Trapezoid 12">
-            <a:extLst>
-              <a:ext uri="{FF2B5EF4-FFF2-40B4-BE49-F238E27FC236}">
-                <a16:creationId xmlns:a16="http://schemas.microsoft.com/office/drawing/2014/main" id="{3146A1F4-1C3F-7992-9EED-537E63F0EB8F}"/>
-              </a:ext>
-            </a:extLst>
-          </p:cNvPr>
-          <p:cNvSpPr/>
-          <p:nvPr/>
-        </p:nvSpPr>
-        <p:spPr>
-          <a:xfrm>
-            <a:off x="3366239" y="25490082"/>
-            <a:ext cx="7793737" cy="3209788"/>
-          </a:xfrm>
-          <a:prstGeom prst="trapezoid">
-            <a:avLst>
-              <a:gd name="adj" fmla="val 57944"/>
-            </a:avLst>
-          </a:prstGeom>
-        </p:spPr>
-        <p:style>
-          <a:lnRef idx="2">
-            <a:schemeClr val="accent1">
-              <a:shade val="15000"/>
-            </a:schemeClr>
-          </a:lnRef>
-          <a:fillRef idx="1">
-            <a:schemeClr val="accent1"/>
-          </a:fillRef>
-          <a:effectRef idx="0">
-            <a:schemeClr val="accent1"/>
-          </a:effectRef>
-          <a:fontRef idx="minor">
-            <a:schemeClr val="lt1"/>
-          </a:fontRef>
-        </p:style>
-        <p:txBody>
-          <a:bodyPr rtlCol="0" anchor="ctr"/>
-          <a:lstStyle/>
-          <a:p>
-            <a:pPr algn="ctr"/>
-            <a:endParaRPr lang="en-US" dirty="0"/>
-          </a:p>
-        </p:txBody>
-      </p:sp>
-      <p:sp>
-        <p:nvSpPr>
-          <p:cNvPr id="22" name="Trapezoid 21">
-            <a:extLst>
-              <a:ext uri="{FF2B5EF4-FFF2-40B4-BE49-F238E27FC236}">
-                <a16:creationId xmlns:a16="http://schemas.microsoft.com/office/drawing/2014/main" id="{1C11796C-969B-FCBA-3186-3B1A7423DD49}"/>
-              </a:ext>
-            </a:extLst>
-          </p:cNvPr>
-          <p:cNvSpPr/>
-          <p:nvPr/>
-        </p:nvSpPr>
-        <p:spPr>
-          <a:xfrm rot="14400000">
-            <a:off x="34555276" y="4862764"/>
-            <a:ext cx="7793737" cy="3209788"/>
-          </a:xfrm>
-          <a:prstGeom prst="trapezoid">
-            <a:avLst>
-              <a:gd name="adj" fmla="val 57944"/>
-            </a:avLst>
-          </a:prstGeom>
-        </p:spPr>
-        <p:style>
-          <a:lnRef idx="2">
-            <a:schemeClr val="accent1">
-              <a:shade val="15000"/>
-            </a:schemeClr>
-          </a:lnRef>
-          <a:fillRef idx="1">
-            <a:schemeClr val="accent1"/>
-          </a:fillRef>
-          <a:effectRef idx="0">
-            <a:schemeClr val="accent1"/>
-          </a:effectRef>
-          <a:fontRef idx="minor">
-            <a:schemeClr val="lt1"/>
-          </a:fontRef>
-        </p:style>
-        <p:txBody>
-          <a:bodyPr rtlCol="0" anchor="ctr"/>
-          <a:lstStyle/>
-          <a:p>
-            <a:pPr algn="ctr"/>
-            <a:endParaRPr lang="en-US" dirty="0"/>
-          </a:p>
-        </p:txBody>
-      </p:sp>
-      <p:sp>
-        <p:nvSpPr>
-          <p:cNvPr id="23" name="Trapezoid 22">
-            <a:extLst>
-              <a:ext uri="{FF2B5EF4-FFF2-40B4-BE49-F238E27FC236}">
-                <a16:creationId xmlns:a16="http://schemas.microsoft.com/office/drawing/2014/main" id="{24421C79-8FEE-1140-7173-B9C1853D9B99}"/>
-              </a:ext>
-            </a:extLst>
-          </p:cNvPr>
-          <p:cNvSpPr/>
-          <p:nvPr/>
-        </p:nvSpPr>
-        <p:spPr>
-          <a:xfrm rot="7200000">
-            <a:off x="2289775" y="8212982"/>
-            <a:ext cx="7793737" cy="3209788"/>
-          </a:xfrm>
-          <a:prstGeom prst="trapezoid">
-            <a:avLst>
-              <a:gd name="adj" fmla="val 57944"/>
-            </a:avLst>
-          </a:prstGeom>
-        </p:spPr>
-        <p:style>
-          <a:lnRef idx="2">
-            <a:schemeClr val="accent1">
-              <a:shade val="15000"/>
-            </a:schemeClr>
-          </a:lnRef>
-          <a:fillRef idx="1">
-            <a:schemeClr val="accent1"/>
-          </a:fillRef>
-          <a:effectRef idx="0">
-            <a:schemeClr val="accent1"/>
-          </a:effectRef>
-          <a:fontRef idx="minor">
-            <a:schemeClr val="lt1"/>
-          </a:fontRef>
-        </p:style>
-        <p:txBody>
-          <a:bodyPr rtlCol="0" anchor="ctr"/>
-          <a:lstStyle/>
-          <a:p>
-            <a:pPr algn="ctr"/>
-            <a:endParaRPr lang="en-US" dirty="0"/>
-          </a:p>
-        </p:txBody>
-      </p:sp>
-    </p:spTree>
-    <p:extLst>
-      <p:ext uri="{BB962C8B-B14F-4D97-AF65-F5344CB8AC3E}">
-        <p14:creationId xmlns:p14="http://schemas.microsoft.com/office/powerpoint/2010/main" val="4078793599"/>
-      </p:ext>
-    </p:extLst>
-  </p:cSld>
-  <p:clrMapOvr>
-    <a:masterClrMapping/>
-  </p:clrMapOvr>
-</p:sld>
-</file>
-
-<file path=ppt/slides/slide2.xml><?xml version="1.0" encoding="utf-8"?>
 <p:sld xmlns:a="http://schemas.openxmlformats.org/drawingml/2006/main" xmlns:r="http://schemas.openxmlformats.org/officeDocument/2006/relationships" xmlns:p="http://schemas.openxmlformats.org/presentationml/2006/main">
   <p:cSld>
     <p:spTree>
@@ -4041,7 +3649,7 @@
 </p:sld>
 </file>
 
-<file path=ppt/slides/slide3.xml><?xml version="1.0" encoding="utf-8"?>
+<file path=ppt/slides/slide2.xml><?xml version="1.0" encoding="utf-8"?>
 <p:sld xmlns:a="http://schemas.openxmlformats.org/drawingml/2006/main" xmlns:r="http://schemas.openxmlformats.org/officeDocument/2006/relationships" xmlns:p="http://schemas.openxmlformats.org/presentationml/2006/main">
   <p:cSld>
     <p:spTree>
@@ -4911,7 +4519,7 @@
 </p:sld>
 </file>
 
-<file path=ppt/slides/slide4.xml><?xml version="1.0" encoding="utf-8"?>
+<file path=ppt/slides/slide3.xml><?xml version="1.0" encoding="utf-8"?>
 <p:sld xmlns:a="http://schemas.openxmlformats.org/drawingml/2006/main" xmlns:r="http://schemas.openxmlformats.org/officeDocument/2006/relationships" xmlns:p="http://schemas.openxmlformats.org/presentationml/2006/main">
   <p:cSld>
     <p:spTree>
@@ -5773,7 +5381,7 @@
 </p:sld>
 </file>
 
-<file path=ppt/slides/slide5.xml><?xml version="1.0" encoding="utf-8"?>
+<file path=ppt/slides/slide4.xml><?xml version="1.0" encoding="utf-8"?>
 <p:sld xmlns:a="http://schemas.openxmlformats.org/drawingml/2006/main" xmlns:r="http://schemas.openxmlformats.org/officeDocument/2006/relationships" xmlns:p="http://schemas.openxmlformats.org/presentationml/2006/main">
   <p:cSld>
     <p:spTree>
@@ -6910,7 +6518,7 @@
 </p:sld>
 </file>
 
-<file path=ppt/slides/slide6.xml><?xml version="1.0" encoding="utf-8"?>
+<file path=ppt/slides/slide5.xml><?xml version="1.0" encoding="utf-8"?>
 <p:sld xmlns:a="http://schemas.openxmlformats.org/drawingml/2006/main" xmlns:r="http://schemas.openxmlformats.org/officeDocument/2006/relationships" xmlns:p="http://schemas.openxmlformats.org/presentationml/2006/main">
   <p:cSld>
     <p:spTree>
@@ -7951,7 +7559,7 @@
 </p:sld>
 </file>
 
-<file path=ppt/slides/slide7.xml><?xml version="1.0" encoding="utf-8"?>
+<file path=ppt/slides/slide6.xml><?xml version="1.0" encoding="utf-8"?>
 <p:sld xmlns:a="http://schemas.openxmlformats.org/drawingml/2006/main" xmlns:r="http://schemas.openxmlformats.org/officeDocument/2006/relationships" xmlns:p="http://schemas.openxmlformats.org/presentationml/2006/main">
   <p:cSld>
     <p:spTree>
